--- a/competition/Aranea-Agents-初赛提交包-20260805/02-方案PPT.pptx
+++ b/competition/Aranea-Agents-初赛提交包-20260805/02-方案PPT.pptx
@@ -17,8 +17,13 @@
     <p:sldId id="265" r:id="rId16"/>
     <p:sldId id="266" r:id="rId17"/>
     <p:sldId id="267" r:id="rId18"/>
+    <p:sldId id="268" r:id="rId19"/>
+    <p:sldId id="269" r:id="rId20"/>
+    <p:sldId id="270" r:id="rId21"/>
+    <p:sldId id="271" r:id="rId22"/>
+    <p:sldId id="272" r:id="rId23"/>
   </p:sldIdLst>
-  <p:sldSz cx="12191695" cy="6858000" type="screen4x3"/>
+  <p:sldSz cx="12192000" cy="6858000" type="screen4x3"/>
   <p:notesSz cx="6858000" cy="9144000"/>
   <p:defaultTextStyle>
     <a:defPPr>
@@ -3101,7 +3106,7 @@
       <p:grpSpPr/>
       <p:pic>
         <p:nvPicPr>
-          <p:cNvPr id="2" name="Picture 1" descr="slide-01.png"/>
+          <p:cNvPr id="2" name="Picture 1" descr="s01.png"/>
           <p:cNvPicPr>
             <a:picLocks noChangeAspect="1"/>
           </p:cNvPicPr>
@@ -3116,13 +3121,91 @@
         <p:spPr>
           <a:xfrm>
             <a:off x="0" y="0"/>
-            <a:ext cx="12191695" cy="6858000"/>
+            <a:ext cx="12192000" cy="6858000"/>
           </a:xfrm>
           <a:prstGeom prst="rect">
             <a:avLst/>
           </a:prstGeom>
         </p:spPr>
       </p:pic>
+      <p:sp>
+        <p:nvSpPr>
+          <p:cNvPr id="3" name="Rectangle 2"/>
+          <p:cNvSpPr/>
+          <p:nvPr/>
+        </p:nvSpPr>
+        <p:spPr>
+          <a:xfrm>
+            <a:off x="10731500" y="6464300"/>
+            <a:ext cx="1460500" cy="393700"/>
+          </a:xfrm>
+          <a:prstGeom prst="rect">
+            <a:avLst/>
+          </a:prstGeom>
+          <a:solidFill>
+            <a:srgbClr val="0A1018"/>
+          </a:solidFill>
+          <a:ln>
+            <a:noFill/>
+          </a:ln>
+          <a:effectLst/>
+        </p:spPr>
+        <p:style>
+          <a:lnRef idx="1">
+            <a:schemeClr val="accent1"/>
+          </a:lnRef>
+          <a:fillRef idx="3">
+            <a:schemeClr val="accent1"/>
+          </a:fillRef>
+          <a:effectRef idx="2">
+            <a:schemeClr val="accent1"/>
+          </a:effectRef>
+          <a:fontRef idx="minor">
+            <a:schemeClr val="lt1"/>
+          </a:fontRef>
+        </p:style>
+        <p:txBody>
+          <a:bodyPr rtlCol="0" anchor="ctr"/>
+          <a:lstStyle/>
+          <a:p>
+            <a:pPr algn="ctr"/>
+          </a:p>
+        </p:txBody>
+      </p:sp>
+      <p:sp>
+        <p:nvSpPr>
+          <p:cNvPr id="4" name="TextBox 3"/>
+          <p:cNvSpPr txBox="1"/>
+          <p:nvPr/>
+        </p:nvSpPr>
+        <p:spPr>
+          <a:xfrm>
+            <a:off x="10731500" y="6464300"/>
+            <a:ext cx="1174750" cy="393700"/>
+          </a:xfrm>
+          <a:prstGeom prst="rect">
+            <a:avLst/>
+          </a:prstGeom>
+          <a:noFill/>
+        </p:spPr>
+        <p:txBody>
+          <a:bodyPr wrap="none" lIns="0" rIns="0" tIns="0" bIns="0" anchor="ctr">
+            <a:spAutoFit/>
+          </a:bodyPr>
+          <a:lstStyle/>
+          <a:p>
+            <a:pPr algn="r"/>
+            <a:r>
+              <a:rPr sz="1000">
+                <a:solidFill>
+                  <a:srgbClr val="5F6B84"/>
+                </a:solidFill>
+              </a:rPr>
+              <a:t>1 / 17</a:t>
+            </a:r>
+          </a:p>
+        </p:txBody>
+      </p:sp>
     </p:spTree>
   </p:cSld>
   <p:clrMapOvr>
@@ -3143,7 +3226,7 @@
       <p:grpSpPr/>
       <p:pic>
         <p:nvPicPr>
-          <p:cNvPr id="2" name="Picture 1" descr="slide-10.png"/>
+          <p:cNvPr id="2" name="Picture 1" descr="s06.png"/>
           <p:cNvPicPr>
             <a:picLocks noChangeAspect="1"/>
           </p:cNvPicPr>
@@ -3158,13 +3241,91 @@
         <p:spPr>
           <a:xfrm>
             <a:off x="0" y="0"/>
-            <a:ext cx="12191695" cy="6858000"/>
+            <a:ext cx="12192000" cy="6858000"/>
           </a:xfrm>
           <a:prstGeom prst="rect">
             <a:avLst/>
           </a:prstGeom>
         </p:spPr>
       </p:pic>
+      <p:sp>
+        <p:nvSpPr>
+          <p:cNvPr id="3" name="Rectangle 2"/>
+          <p:cNvSpPr/>
+          <p:nvPr/>
+        </p:nvSpPr>
+        <p:spPr>
+          <a:xfrm>
+            <a:off x="10731500" y="6464300"/>
+            <a:ext cx="1460500" cy="393700"/>
+          </a:xfrm>
+          <a:prstGeom prst="rect">
+            <a:avLst/>
+          </a:prstGeom>
+          <a:solidFill>
+            <a:srgbClr val="0A1018"/>
+          </a:solidFill>
+          <a:ln>
+            <a:noFill/>
+          </a:ln>
+          <a:effectLst/>
+        </p:spPr>
+        <p:style>
+          <a:lnRef idx="1">
+            <a:schemeClr val="accent1"/>
+          </a:lnRef>
+          <a:fillRef idx="3">
+            <a:schemeClr val="accent1"/>
+          </a:fillRef>
+          <a:effectRef idx="2">
+            <a:schemeClr val="accent1"/>
+          </a:effectRef>
+          <a:fontRef idx="minor">
+            <a:schemeClr val="lt1"/>
+          </a:fontRef>
+        </p:style>
+        <p:txBody>
+          <a:bodyPr rtlCol="0" anchor="ctr"/>
+          <a:lstStyle/>
+          <a:p>
+            <a:pPr algn="ctr"/>
+          </a:p>
+        </p:txBody>
+      </p:sp>
+      <p:sp>
+        <p:nvSpPr>
+          <p:cNvPr id="4" name="TextBox 3"/>
+          <p:cNvSpPr txBox="1"/>
+          <p:nvPr/>
+        </p:nvSpPr>
+        <p:spPr>
+          <a:xfrm>
+            <a:off x="10731500" y="6464300"/>
+            <a:ext cx="1174750" cy="393700"/>
+          </a:xfrm>
+          <a:prstGeom prst="rect">
+            <a:avLst/>
+          </a:prstGeom>
+          <a:noFill/>
+        </p:spPr>
+        <p:txBody>
+          <a:bodyPr wrap="none" lIns="0" rIns="0" tIns="0" bIns="0" anchor="ctr">
+            <a:spAutoFit/>
+          </a:bodyPr>
+          <a:lstStyle/>
+          <a:p>
+            <a:pPr algn="r"/>
+            <a:r>
+              <a:rPr sz="1000">
+                <a:solidFill>
+                  <a:srgbClr val="5F6B84"/>
+                </a:solidFill>
+              </a:rPr>
+              <a:t>10 / 17</a:t>
+            </a:r>
+          </a:p>
+        </p:txBody>
+      </p:sp>
     </p:spTree>
   </p:cSld>
   <p:clrMapOvr>
@@ -3185,7 +3346,7 @@
       <p:grpSpPr/>
       <p:pic>
         <p:nvPicPr>
-          <p:cNvPr id="2" name="Picture 1" descr="slide-11.png"/>
+          <p:cNvPr id="2" name="Picture 1" descr="s07.png"/>
           <p:cNvPicPr>
             <a:picLocks noChangeAspect="1"/>
           </p:cNvPicPr>
@@ -3200,13 +3361,91 @@
         <p:spPr>
           <a:xfrm>
             <a:off x="0" y="0"/>
-            <a:ext cx="12191695" cy="6858000"/>
+            <a:ext cx="12192000" cy="6858000"/>
           </a:xfrm>
           <a:prstGeom prst="rect">
             <a:avLst/>
           </a:prstGeom>
         </p:spPr>
       </p:pic>
+      <p:sp>
+        <p:nvSpPr>
+          <p:cNvPr id="3" name="Rectangle 2"/>
+          <p:cNvSpPr/>
+          <p:nvPr/>
+        </p:nvSpPr>
+        <p:spPr>
+          <a:xfrm>
+            <a:off x="10731500" y="6464300"/>
+            <a:ext cx="1460500" cy="393700"/>
+          </a:xfrm>
+          <a:prstGeom prst="rect">
+            <a:avLst/>
+          </a:prstGeom>
+          <a:solidFill>
+            <a:srgbClr val="0A1018"/>
+          </a:solidFill>
+          <a:ln>
+            <a:noFill/>
+          </a:ln>
+          <a:effectLst/>
+        </p:spPr>
+        <p:style>
+          <a:lnRef idx="1">
+            <a:schemeClr val="accent1"/>
+          </a:lnRef>
+          <a:fillRef idx="3">
+            <a:schemeClr val="accent1"/>
+          </a:fillRef>
+          <a:effectRef idx="2">
+            <a:schemeClr val="accent1"/>
+          </a:effectRef>
+          <a:fontRef idx="minor">
+            <a:schemeClr val="lt1"/>
+          </a:fontRef>
+        </p:style>
+        <p:txBody>
+          <a:bodyPr rtlCol="0" anchor="ctr"/>
+          <a:lstStyle/>
+          <a:p>
+            <a:pPr algn="ctr"/>
+          </a:p>
+        </p:txBody>
+      </p:sp>
+      <p:sp>
+        <p:nvSpPr>
+          <p:cNvPr id="4" name="TextBox 3"/>
+          <p:cNvSpPr txBox="1"/>
+          <p:nvPr/>
+        </p:nvSpPr>
+        <p:spPr>
+          <a:xfrm>
+            <a:off x="10731500" y="6464300"/>
+            <a:ext cx="1174750" cy="393700"/>
+          </a:xfrm>
+          <a:prstGeom prst="rect">
+            <a:avLst/>
+          </a:prstGeom>
+          <a:noFill/>
+        </p:spPr>
+        <p:txBody>
+          <a:bodyPr wrap="none" lIns="0" rIns="0" tIns="0" bIns="0" anchor="ctr">
+            <a:spAutoFit/>
+          </a:bodyPr>
+          <a:lstStyle/>
+          <a:p>
+            <a:pPr algn="r"/>
+            <a:r>
+              <a:rPr sz="1000">
+                <a:solidFill>
+                  <a:srgbClr val="5F6B84"/>
+                </a:solidFill>
+              </a:rPr>
+              <a:t>11 / 17</a:t>
+            </a:r>
+          </a:p>
+        </p:txBody>
+      </p:sp>
     </p:spTree>
   </p:cSld>
   <p:clrMapOvr>
@@ -3227,7 +3466,7 @@
       <p:grpSpPr/>
       <p:pic>
         <p:nvPicPr>
-          <p:cNvPr id="2" name="Picture 1" descr="slide-12.png"/>
+          <p:cNvPr id="2" name="Picture 1" descr="s08.png"/>
           <p:cNvPicPr>
             <a:picLocks noChangeAspect="1"/>
           </p:cNvPicPr>
@@ -3242,13 +3481,603 @@
         <p:spPr>
           <a:xfrm>
             <a:off x="0" y="0"/>
-            <a:ext cx="12191695" cy="6858000"/>
+            <a:ext cx="12192000" cy="6858000"/>
           </a:xfrm>
           <a:prstGeom prst="rect">
             <a:avLst/>
           </a:prstGeom>
         </p:spPr>
       </p:pic>
+      <p:sp>
+        <p:nvSpPr>
+          <p:cNvPr id="3" name="Rectangle 2"/>
+          <p:cNvSpPr/>
+          <p:nvPr/>
+        </p:nvSpPr>
+        <p:spPr>
+          <a:xfrm>
+            <a:off x="10731500" y="6464300"/>
+            <a:ext cx="1460500" cy="393700"/>
+          </a:xfrm>
+          <a:prstGeom prst="rect">
+            <a:avLst/>
+          </a:prstGeom>
+          <a:solidFill>
+            <a:srgbClr val="0A1018"/>
+          </a:solidFill>
+          <a:ln>
+            <a:noFill/>
+          </a:ln>
+          <a:effectLst/>
+        </p:spPr>
+        <p:style>
+          <a:lnRef idx="1">
+            <a:schemeClr val="accent1"/>
+          </a:lnRef>
+          <a:fillRef idx="3">
+            <a:schemeClr val="accent1"/>
+          </a:fillRef>
+          <a:effectRef idx="2">
+            <a:schemeClr val="accent1"/>
+          </a:effectRef>
+          <a:fontRef idx="minor">
+            <a:schemeClr val="lt1"/>
+          </a:fontRef>
+        </p:style>
+        <p:txBody>
+          <a:bodyPr rtlCol="0" anchor="ctr"/>
+          <a:lstStyle/>
+          <a:p>
+            <a:pPr algn="ctr"/>
+          </a:p>
+        </p:txBody>
+      </p:sp>
+      <p:sp>
+        <p:nvSpPr>
+          <p:cNvPr id="4" name="TextBox 3"/>
+          <p:cNvSpPr txBox="1"/>
+          <p:nvPr/>
+        </p:nvSpPr>
+        <p:spPr>
+          <a:xfrm>
+            <a:off x="10731500" y="6464300"/>
+            <a:ext cx="1174750" cy="393700"/>
+          </a:xfrm>
+          <a:prstGeom prst="rect">
+            <a:avLst/>
+          </a:prstGeom>
+          <a:noFill/>
+        </p:spPr>
+        <p:txBody>
+          <a:bodyPr wrap="none" lIns="0" rIns="0" tIns="0" bIns="0" anchor="ctr">
+            <a:spAutoFit/>
+          </a:bodyPr>
+          <a:lstStyle/>
+          <a:p>
+            <a:pPr algn="r"/>
+            <a:r>
+              <a:rPr sz="1000">
+                <a:solidFill>
+                  <a:srgbClr val="5F6B84"/>
+                </a:solidFill>
+              </a:rPr>
+              <a:t>12 / 17</a:t>
+            </a:r>
+          </a:p>
+        </p:txBody>
+      </p:sp>
+    </p:spTree>
+  </p:cSld>
+  <p:clrMapOvr>
+    <a:masterClrMapping/>
+  </p:clrMapOvr>
+</p:sld>
+</file>
+
+<file path=ppt/slides/slide13.xml><?xml version="1.0" encoding="utf-8"?>
+<p:sld xmlns:a="http://schemas.openxmlformats.org/drawingml/2006/main" xmlns:p="http://schemas.openxmlformats.org/presentationml/2006/main" xmlns:r="http://schemas.openxmlformats.org/officeDocument/2006/relationships">
+  <p:cSld>
+    <p:spTree>
+      <p:nvGrpSpPr>
+        <p:cNvPr id="1" name=""/>
+        <p:cNvGrpSpPr/>
+        <p:nvPr/>
+      </p:nvGrpSpPr>
+      <p:grpSpPr/>
+      <p:pic>
+        <p:nvPicPr>
+          <p:cNvPr id="2" name="Picture 1" descr="new-06.png"/>
+          <p:cNvPicPr>
+            <a:picLocks noChangeAspect="1"/>
+          </p:cNvPicPr>
+          <p:nvPr/>
+        </p:nvPicPr>
+        <p:blipFill>
+          <a:blip r:embed="rId2"/>
+          <a:stretch>
+            <a:fillRect/>
+          </a:stretch>
+        </p:blipFill>
+        <p:spPr>
+          <a:xfrm>
+            <a:off x="0" y="0"/>
+            <a:ext cx="12192000" cy="6858000"/>
+          </a:xfrm>
+          <a:prstGeom prst="rect">
+            <a:avLst/>
+          </a:prstGeom>
+        </p:spPr>
+      </p:pic>
+      <p:sp>
+        <p:nvSpPr>
+          <p:cNvPr id="3" name="TextBox 2"/>
+          <p:cNvSpPr txBox="1"/>
+          <p:nvPr/>
+        </p:nvSpPr>
+        <p:spPr>
+          <a:xfrm>
+            <a:off x="10731500" y="6464300"/>
+            <a:ext cx="1174750" cy="393700"/>
+          </a:xfrm>
+          <a:prstGeom prst="rect">
+            <a:avLst/>
+          </a:prstGeom>
+          <a:noFill/>
+        </p:spPr>
+        <p:txBody>
+          <a:bodyPr wrap="none" lIns="0" rIns="0" tIns="0" bIns="0" anchor="ctr">
+            <a:spAutoFit/>
+          </a:bodyPr>
+          <a:lstStyle/>
+          <a:p>
+            <a:pPr algn="r"/>
+            <a:r>
+              <a:rPr sz="1000">
+                <a:solidFill>
+                  <a:srgbClr val="5F6B84"/>
+                </a:solidFill>
+              </a:rPr>
+              <a:t>13 / 17</a:t>
+            </a:r>
+          </a:p>
+        </p:txBody>
+      </p:sp>
+    </p:spTree>
+  </p:cSld>
+  <p:clrMapOvr>
+    <a:masterClrMapping/>
+  </p:clrMapOvr>
+</p:sld>
+</file>
+
+<file path=ppt/slides/slide14.xml><?xml version="1.0" encoding="utf-8"?>
+<p:sld xmlns:a="http://schemas.openxmlformats.org/drawingml/2006/main" xmlns:p="http://schemas.openxmlformats.org/presentationml/2006/main" xmlns:r="http://schemas.openxmlformats.org/officeDocument/2006/relationships">
+  <p:cSld>
+    <p:spTree>
+      <p:nvGrpSpPr>
+        <p:cNvPr id="1" name=""/>
+        <p:cNvGrpSpPr/>
+        <p:nvPr/>
+      </p:nvGrpSpPr>
+      <p:grpSpPr/>
+      <p:pic>
+        <p:nvPicPr>
+          <p:cNvPr id="2" name="Picture 1" descr="s10.png"/>
+          <p:cNvPicPr>
+            <a:picLocks noChangeAspect="1"/>
+          </p:cNvPicPr>
+          <p:nvPr/>
+        </p:nvPicPr>
+        <p:blipFill>
+          <a:blip r:embed="rId2"/>
+          <a:stretch>
+            <a:fillRect/>
+          </a:stretch>
+        </p:blipFill>
+        <p:spPr>
+          <a:xfrm>
+            <a:off x="0" y="0"/>
+            <a:ext cx="12192000" cy="6858000"/>
+          </a:xfrm>
+          <a:prstGeom prst="rect">
+            <a:avLst/>
+          </a:prstGeom>
+        </p:spPr>
+      </p:pic>
+      <p:sp>
+        <p:nvSpPr>
+          <p:cNvPr id="3" name="Rectangle 2"/>
+          <p:cNvSpPr/>
+          <p:nvPr/>
+        </p:nvSpPr>
+        <p:spPr>
+          <a:xfrm>
+            <a:off x="10731500" y="6464300"/>
+            <a:ext cx="1460500" cy="393700"/>
+          </a:xfrm>
+          <a:prstGeom prst="rect">
+            <a:avLst/>
+          </a:prstGeom>
+          <a:solidFill>
+            <a:srgbClr val="0A1018"/>
+          </a:solidFill>
+          <a:ln>
+            <a:noFill/>
+          </a:ln>
+          <a:effectLst/>
+        </p:spPr>
+        <p:style>
+          <a:lnRef idx="1">
+            <a:schemeClr val="accent1"/>
+          </a:lnRef>
+          <a:fillRef idx="3">
+            <a:schemeClr val="accent1"/>
+          </a:fillRef>
+          <a:effectRef idx="2">
+            <a:schemeClr val="accent1"/>
+          </a:effectRef>
+          <a:fontRef idx="minor">
+            <a:schemeClr val="lt1"/>
+          </a:fontRef>
+        </p:style>
+        <p:txBody>
+          <a:bodyPr rtlCol="0" anchor="ctr"/>
+          <a:lstStyle/>
+          <a:p>
+            <a:pPr algn="ctr"/>
+          </a:p>
+        </p:txBody>
+      </p:sp>
+      <p:sp>
+        <p:nvSpPr>
+          <p:cNvPr id="4" name="TextBox 3"/>
+          <p:cNvSpPr txBox="1"/>
+          <p:nvPr/>
+        </p:nvSpPr>
+        <p:spPr>
+          <a:xfrm>
+            <a:off x="10731500" y="6464300"/>
+            <a:ext cx="1174750" cy="393700"/>
+          </a:xfrm>
+          <a:prstGeom prst="rect">
+            <a:avLst/>
+          </a:prstGeom>
+          <a:noFill/>
+        </p:spPr>
+        <p:txBody>
+          <a:bodyPr wrap="none" lIns="0" rIns="0" tIns="0" bIns="0" anchor="ctr">
+            <a:spAutoFit/>
+          </a:bodyPr>
+          <a:lstStyle/>
+          <a:p>
+            <a:pPr algn="r"/>
+            <a:r>
+              <a:rPr sz="1000">
+                <a:solidFill>
+                  <a:srgbClr val="5F6B84"/>
+                </a:solidFill>
+              </a:rPr>
+              <a:t>14 / 17</a:t>
+            </a:r>
+          </a:p>
+        </p:txBody>
+      </p:sp>
+    </p:spTree>
+  </p:cSld>
+  <p:clrMapOvr>
+    <a:masterClrMapping/>
+  </p:clrMapOvr>
+</p:sld>
+</file>
+
+<file path=ppt/slides/slide15.xml><?xml version="1.0" encoding="utf-8"?>
+<p:sld xmlns:a="http://schemas.openxmlformats.org/drawingml/2006/main" xmlns:p="http://schemas.openxmlformats.org/presentationml/2006/main" xmlns:r="http://schemas.openxmlformats.org/officeDocument/2006/relationships">
+  <p:cSld>
+    <p:spTree>
+      <p:nvGrpSpPr>
+        <p:cNvPr id="1" name=""/>
+        <p:cNvGrpSpPr/>
+        <p:nvPr/>
+      </p:nvGrpSpPr>
+      <p:grpSpPr/>
+      <p:pic>
+        <p:nvPicPr>
+          <p:cNvPr id="2" name="Picture 1" descr="s11.png"/>
+          <p:cNvPicPr>
+            <a:picLocks noChangeAspect="1"/>
+          </p:cNvPicPr>
+          <p:nvPr/>
+        </p:nvPicPr>
+        <p:blipFill>
+          <a:blip r:embed="rId2"/>
+          <a:stretch>
+            <a:fillRect/>
+          </a:stretch>
+        </p:blipFill>
+        <p:spPr>
+          <a:xfrm>
+            <a:off x="0" y="0"/>
+            <a:ext cx="12192000" cy="6858000"/>
+          </a:xfrm>
+          <a:prstGeom prst="rect">
+            <a:avLst/>
+          </a:prstGeom>
+        </p:spPr>
+      </p:pic>
+      <p:sp>
+        <p:nvSpPr>
+          <p:cNvPr id="3" name="Rectangle 2"/>
+          <p:cNvSpPr/>
+          <p:nvPr/>
+        </p:nvSpPr>
+        <p:spPr>
+          <a:xfrm>
+            <a:off x="10731500" y="6464300"/>
+            <a:ext cx="1460500" cy="393700"/>
+          </a:xfrm>
+          <a:prstGeom prst="rect">
+            <a:avLst/>
+          </a:prstGeom>
+          <a:solidFill>
+            <a:srgbClr val="0A1018"/>
+          </a:solidFill>
+          <a:ln>
+            <a:noFill/>
+          </a:ln>
+          <a:effectLst/>
+        </p:spPr>
+        <p:style>
+          <a:lnRef idx="1">
+            <a:schemeClr val="accent1"/>
+          </a:lnRef>
+          <a:fillRef idx="3">
+            <a:schemeClr val="accent1"/>
+          </a:fillRef>
+          <a:effectRef idx="2">
+            <a:schemeClr val="accent1"/>
+          </a:effectRef>
+          <a:fontRef idx="minor">
+            <a:schemeClr val="lt1"/>
+          </a:fontRef>
+        </p:style>
+        <p:txBody>
+          <a:bodyPr rtlCol="0" anchor="ctr"/>
+          <a:lstStyle/>
+          <a:p>
+            <a:pPr algn="ctr"/>
+          </a:p>
+        </p:txBody>
+      </p:sp>
+      <p:sp>
+        <p:nvSpPr>
+          <p:cNvPr id="4" name="TextBox 3"/>
+          <p:cNvSpPr txBox="1"/>
+          <p:nvPr/>
+        </p:nvSpPr>
+        <p:spPr>
+          <a:xfrm>
+            <a:off x="10731500" y="6464300"/>
+            <a:ext cx="1174750" cy="393700"/>
+          </a:xfrm>
+          <a:prstGeom prst="rect">
+            <a:avLst/>
+          </a:prstGeom>
+          <a:noFill/>
+        </p:spPr>
+        <p:txBody>
+          <a:bodyPr wrap="none" lIns="0" rIns="0" tIns="0" bIns="0" anchor="ctr">
+            <a:spAutoFit/>
+          </a:bodyPr>
+          <a:lstStyle/>
+          <a:p>
+            <a:pPr algn="r"/>
+            <a:r>
+              <a:rPr sz="1000">
+                <a:solidFill>
+                  <a:srgbClr val="5F6B84"/>
+                </a:solidFill>
+              </a:rPr>
+              <a:t>15 / 17</a:t>
+            </a:r>
+          </a:p>
+        </p:txBody>
+      </p:sp>
+    </p:spTree>
+  </p:cSld>
+  <p:clrMapOvr>
+    <a:masterClrMapping/>
+  </p:clrMapOvr>
+</p:sld>
+</file>
+
+<file path=ppt/slides/slide16.xml><?xml version="1.0" encoding="utf-8"?>
+<p:sld xmlns:a="http://schemas.openxmlformats.org/drawingml/2006/main" xmlns:p="http://schemas.openxmlformats.org/presentationml/2006/main" xmlns:r="http://schemas.openxmlformats.org/officeDocument/2006/relationships">
+  <p:cSld>
+    <p:spTree>
+      <p:nvGrpSpPr>
+        <p:cNvPr id="1" name=""/>
+        <p:cNvGrpSpPr/>
+        <p:nvPr/>
+      </p:nvGrpSpPr>
+      <p:grpSpPr/>
+      <p:pic>
+        <p:nvPicPr>
+          <p:cNvPr id="2" name="Picture 1" descr="new-05.png"/>
+          <p:cNvPicPr>
+            <a:picLocks noChangeAspect="1"/>
+          </p:cNvPicPr>
+          <p:nvPr/>
+        </p:nvPicPr>
+        <p:blipFill>
+          <a:blip r:embed="rId2"/>
+          <a:stretch>
+            <a:fillRect/>
+          </a:stretch>
+        </p:blipFill>
+        <p:spPr>
+          <a:xfrm>
+            <a:off x="0" y="0"/>
+            <a:ext cx="12192000" cy="6858000"/>
+          </a:xfrm>
+          <a:prstGeom prst="rect">
+            <a:avLst/>
+          </a:prstGeom>
+        </p:spPr>
+      </p:pic>
+      <p:sp>
+        <p:nvSpPr>
+          <p:cNvPr id="3" name="TextBox 2"/>
+          <p:cNvSpPr txBox="1"/>
+          <p:nvPr/>
+        </p:nvSpPr>
+        <p:spPr>
+          <a:xfrm>
+            <a:off x="10731500" y="6464300"/>
+            <a:ext cx="1174750" cy="393700"/>
+          </a:xfrm>
+          <a:prstGeom prst="rect">
+            <a:avLst/>
+          </a:prstGeom>
+          <a:noFill/>
+        </p:spPr>
+        <p:txBody>
+          <a:bodyPr wrap="none" lIns="0" rIns="0" tIns="0" bIns="0" anchor="ctr">
+            <a:spAutoFit/>
+          </a:bodyPr>
+          <a:lstStyle/>
+          <a:p>
+            <a:pPr algn="r"/>
+            <a:r>
+              <a:rPr sz="1000">
+                <a:solidFill>
+                  <a:srgbClr val="5F6B84"/>
+                </a:solidFill>
+              </a:rPr>
+              <a:t>16 / 17</a:t>
+            </a:r>
+          </a:p>
+        </p:txBody>
+      </p:sp>
+    </p:spTree>
+  </p:cSld>
+  <p:clrMapOvr>
+    <a:masterClrMapping/>
+  </p:clrMapOvr>
+</p:sld>
+</file>
+
+<file path=ppt/slides/slide17.xml><?xml version="1.0" encoding="utf-8"?>
+<p:sld xmlns:a="http://schemas.openxmlformats.org/drawingml/2006/main" xmlns:p="http://schemas.openxmlformats.org/presentationml/2006/main" xmlns:r="http://schemas.openxmlformats.org/officeDocument/2006/relationships">
+  <p:cSld>
+    <p:spTree>
+      <p:nvGrpSpPr>
+        <p:cNvPr id="1" name=""/>
+        <p:cNvGrpSpPr/>
+        <p:nvPr/>
+      </p:nvGrpSpPr>
+      <p:grpSpPr/>
+      <p:pic>
+        <p:nvPicPr>
+          <p:cNvPr id="2" name="Picture 1" descr="s12.png"/>
+          <p:cNvPicPr>
+            <a:picLocks noChangeAspect="1"/>
+          </p:cNvPicPr>
+          <p:nvPr/>
+        </p:nvPicPr>
+        <p:blipFill>
+          <a:blip r:embed="rId2"/>
+          <a:stretch>
+            <a:fillRect/>
+          </a:stretch>
+        </p:blipFill>
+        <p:spPr>
+          <a:xfrm>
+            <a:off x="0" y="0"/>
+            <a:ext cx="12192000" cy="6858000"/>
+          </a:xfrm>
+          <a:prstGeom prst="rect">
+            <a:avLst/>
+          </a:prstGeom>
+        </p:spPr>
+      </p:pic>
+      <p:sp>
+        <p:nvSpPr>
+          <p:cNvPr id="3" name="Rectangle 2"/>
+          <p:cNvSpPr/>
+          <p:nvPr/>
+        </p:nvSpPr>
+        <p:spPr>
+          <a:xfrm>
+            <a:off x="10731500" y="6464300"/>
+            <a:ext cx="1460500" cy="393700"/>
+          </a:xfrm>
+          <a:prstGeom prst="rect">
+            <a:avLst/>
+          </a:prstGeom>
+          <a:solidFill>
+            <a:srgbClr val="0A1018"/>
+          </a:solidFill>
+          <a:ln>
+            <a:noFill/>
+          </a:ln>
+          <a:effectLst/>
+        </p:spPr>
+        <p:style>
+          <a:lnRef idx="1">
+            <a:schemeClr val="accent1"/>
+          </a:lnRef>
+          <a:fillRef idx="3">
+            <a:schemeClr val="accent1"/>
+          </a:fillRef>
+          <a:effectRef idx="2">
+            <a:schemeClr val="accent1"/>
+          </a:effectRef>
+          <a:fontRef idx="minor">
+            <a:schemeClr val="lt1"/>
+          </a:fontRef>
+        </p:style>
+        <p:txBody>
+          <a:bodyPr rtlCol="0" anchor="ctr"/>
+          <a:lstStyle/>
+          <a:p>
+            <a:pPr algn="ctr"/>
+          </a:p>
+        </p:txBody>
+      </p:sp>
+      <p:sp>
+        <p:nvSpPr>
+          <p:cNvPr id="4" name="TextBox 3"/>
+          <p:cNvSpPr txBox="1"/>
+          <p:nvPr/>
+        </p:nvSpPr>
+        <p:spPr>
+          <a:xfrm>
+            <a:off x="10731500" y="6464300"/>
+            <a:ext cx="1174750" cy="393700"/>
+          </a:xfrm>
+          <a:prstGeom prst="rect">
+            <a:avLst/>
+          </a:prstGeom>
+          <a:noFill/>
+        </p:spPr>
+        <p:txBody>
+          <a:bodyPr wrap="none" lIns="0" rIns="0" tIns="0" bIns="0" anchor="ctr">
+            <a:spAutoFit/>
+          </a:bodyPr>
+          <a:lstStyle/>
+          <a:p>
+            <a:pPr algn="r"/>
+            <a:r>
+              <a:rPr sz="1000">
+                <a:solidFill>
+                  <a:srgbClr val="5F6B84"/>
+                </a:solidFill>
+              </a:rPr>
+              <a:t>17 / 17</a:t>
+            </a:r>
+          </a:p>
+        </p:txBody>
+      </p:sp>
     </p:spTree>
   </p:cSld>
   <p:clrMapOvr>
@@ -3269,7 +4098,7 @@
       <p:grpSpPr/>
       <p:pic>
         <p:nvPicPr>
-          <p:cNvPr id="2" name="Picture 1" descr="slide-02.png"/>
+          <p:cNvPr id="2" name="Picture 1" descr="s02.png"/>
           <p:cNvPicPr>
             <a:picLocks noChangeAspect="1"/>
           </p:cNvPicPr>
@@ -3284,13 +4113,91 @@
         <p:spPr>
           <a:xfrm>
             <a:off x="0" y="0"/>
-            <a:ext cx="12191695" cy="6858000"/>
+            <a:ext cx="12192000" cy="6858000"/>
           </a:xfrm>
           <a:prstGeom prst="rect">
             <a:avLst/>
           </a:prstGeom>
         </p:spPr>
       </p:pic>
+      <p:sp>
+        <p:nvSpPr>
+          <p:cNvPr id="3" name="Rectangle 2"/>
+          <p:cNvSpPr/>
+          <p:nvPr/>
+        </p:nvSpPr>
+        <p:spPr>
+          <a:xfrm>
+            <a:off x="10731500" y="6464300"/>
+            <a:ext cx="1460500" cy="393700"/>
+          </a:xfrm>
+          <a:prstGeom prst="rect">
+            <a:avLst/>
+          </a:prstGeom>
+          <a:solidFill>
+            <a:srgbClr val="0A1018"/>
+          </a:solidFill>
+          <a:ln>
+            <a:noFill/>
+          </a:ln>
+          <a:effectLst/>
+        </p:spPr>
+        <p:style>
+          <a:lnRef idx="1">
+            <a:schemeClr val="accent1"/>
+          </a:lnRef>
+          <a:fillRef idx="3">
+            <a:schemeClr val="accent1"/>
+          </a:fillRef>
+          <a:effectRef idx="2">
+            <a:schemeClr val="accent1"/>
+          </a:effectRef>
+          <a:fontRef idx="minor">
+            <a:schemeClr val="lt1"/>
+          </a:fontRef>
+        </p:style>
+        <p:txBody>
+          <a:bodyPr rtlCol="0" anchor="ctr"/>
+          <a:lstStyle/>
+          <a:p>
+            <a:pPr algn="ctr"/>
+          </a:p>
+        </p:txBody>
+      </p:sp>
+      <p:sp>
+        <p:nvSpPr>
+          <p:cNvPr id="4" name="TextBox 3"/>
+          <p:cNvSpPr txBox="1"/>
+          <p:nvPr/>
+        </p:nvSpPr>
+        <p:spPr>
+          <a:xfrm>
+            <a:off x="10731500" y="6464300"/>
+            <a:ext cx="1174750" cy="393700"/>
+          </a:xfrm>
+          <a:prstGeom prst="rect">
+            <a:avLst/>
+          </a:prstGeom>
+          <a:noFill/>
+        </p:spPr>
+        <p:txBody>
+          <a:bodyPr wrap="none" lIns="0" rIns="0" tIns="0" bIns="0" anchor="ctr">
+            <a:spAutoFit/>
+          </a:bodyPr>
+          <a:lstStyle/>
+          <a:p>
+            <a:pPr algn="r"/>
+            <a:r>
+              <a:rPr sz="1000">
+                <a:solidFill>
+                  <a:srgbClr val="5F6B84"/>
+                </a:solidFill>
+              </a:rPr>
+              <a:t>2 / 17</a:t>
+            </a:r>
+          </a:p>
+        </p:txBody>
+      </p:sp>
     </p:spTree>
   </p:cSld>
   <p:clrMapOvr>
@@ -3311,7 +4218,7 @@
       <p:grpSpPr/>
       <p:pic>
         <p:nvPicPr>
-          <p:cNvPr id="2" name="Picture 1" descr="slide-03.png"/>
+          <p:cNvPr id="2" name="Picture 1" descr="new-01.png"/>
           <p:cNvPicPr>
             <a:picLocks noChangeAspect="1"/>
           </p:cNvPicPr>
@@ -3326,13 +4233,47 @@
         <p:spPr>
           <a:xfrm>
             <a:off x="0" y="0"/>
-            <a:ext cx="12191695" cy="6858000"/>
+            <a:ext cx="12192000" cy="6858000"/>
           </a:xfrm>
           <a:prstGeom prst="rect">
             <a:avLst/>
           </a:prstGeom>
         </p:spPr>
       </p:pic>
+      <p:sp>
+        <p:nvSpPr>
+          <p:cNvPr id="3" name="TextBox 2"/>
+          <p:cNvSpPr txBox="1"/>
+          <p:nvPr/>
+        </p:nvSpPr>
+        <p:spPr>
+          <a:xfrm>
+            <a:off x="10731500" y="6464300"/>
+            <a:ext cx="1174750" cy="393700"/>
+          </a:xfrm>
+          <a:prstGeom prst="rect">
+            <a:avLst/>
+          </a:prstGeom>
+          <a:noFill/>
+        </p:spPr>
+        <p:txBody>
+          <a:bodyPr wrap="none" lIns="0" rIns="0" tIns="0" bIns="0" anchor="ctr">
+            <a:spAutoFit/>
+          </a:bodyPr>
+          <a:lstStyle/>
+          <a:p>
+            <a:pPr algn="r"/>
+            <a:r>
+              <a:rPr sz="1000">
+                <a:solidFill>
+                  <a:srgbClr val="5F6B84"/>
+                </a:solidFill>
+              </a:rPr>
+              <a:t>3 / 17</a:t>
+            </a:r>
+          </a:p>
+        </p:txBody>
+      </p:sp>
     </p:spTree>
   </p:cSld>
   <p:clrMapOvr>
@@ -3353,7 +4294,7 @@
       <p:grpSpPr/>
       <p:pic>
         <p:nvPicPr>
-          <p:cNvPr id="2" name="Picture 1" descr="slide-04.png"/>
+          <p:cNvPr id="2" name="Picture 1" descr="s03.png"/>
           <p:cNvPicPr>
             <a:picLocks noChangeAspect="1"/>
           </p:cNvPicPr>
@@ -3368,13 +4309,91 @@
         <p:spPr>
           <a:xfrm>
             <a:off x="0" y="0"/>
-            <a:ext cx="12191695" cy="6858000"/>
+            <a:ext cx="12192000" cy="6858000"/>
           </a:xfrm>
           <a:prstGeom prst="rect">
             <a:avLst/>
           </a:prstGeom>
         </p:spPr>
       </p:pic>
+      <p:sp>
+        <p:nvSpPr>
+          <p:cNvPr id="3" name="Rectangle 2"/>
+          <p:cNvSpPr/>
+          <p:nvPr/>
+        </p:nvSpPr>
+        <p:spPr>
+          <a:xfrm>
+            <a:off x="10731500" y="6464300"/>
+            <a:ext cx="1460500" cy="393700"/>
+          </a:xfrm>
+          <a:prstGeom prst="rect">
+            <a:avLst/>
+          </a:prstGeom>
+          <a:solidFill>
+            <a:srgbClr val="0A1018"/>
+          </a:solidFill>
+          <a:ln>
+            <a:noFill/>
+          </a:ln>
+          <a:effectLst/>
+        </p:spPr>
+        <p:style>
+          <a:lnRef idx="1">
+            <a:schemeClr val="accent1"/>
+          </a:lnRef>
+          <a:fillRef idx="3">
+            <a:schemeClr val="accent1"/>
+          </a:fillRef>
+          <a:effectRef idx="2">
+            <a:schemeClr val="accent1"/>
+          </a:effectRef>
+          <a:fontRef idx="minor">
+            <a:schemeClr val="lt1"/>
+          </a:fontRef>
+        </p:style>
+        <p:txBody>
+          <a:bodyPr rtlCol="0" anchor="ctr"/>
+          <a:lstStyle/>
+          <a:p>
+            <a:pPr algn="ctr"/>
+          </a:p>
+        </p:txBody>
+      </p:sp>
+      <p:sp>
+        <p:nvSpPr>
+          <p:cNvPr id="4" name="TextBox 3"/>
+          <p:cNvSpPr txBox="1"/>
+          <p:nvPr/>
+        </p:nvSpPr>
+        <p:spPr>
+          <a:xfrm>
+            <a:off x="10731500" y="6464300"/>
+            <a:ext cx="1174750" cy="393700"/>
+          </a:xfrm>
+          <a:prstGeom prst="rect">
+            <a:avLst/>
+          </a:prstGeom>
+          <a:noFill/>
+        </p:spPr>
+        <p:txBody>
+          <a:bodyPr wrap="none" lIns="0" rIns="0" tIns="0" bIns="0" anchor="ctr">
+            <a:spAutoFit/>
+          </a:bodyPr>
+          <a:lstStyle/>
+          <a:p>
+            <a:pPr algn="r"/>
+            <a:r>
+              <a:rPr sz="1000">
+                <a:solidFill>
+                  <a:srgbClr val="5F6B84"/>
+                </a:solidFill>
+              </a:rPr>
+              <a:t>4 / 17</a:t>
+            </a:r>
+          </a:p>
+        </p:txBody>
+      </p:sp>
     </p:spTree>
   </p:cSld>
   <p:clrMapOvr>
@@ -3395,7 +4414,7 @@
       <p:grpSpPr/>
       <p:pic>
         <p:nvPicPr>
-          <p:cNvPr id="2" name="Picture 1" descr="slide-05.png"/>
+          <p:cNvPr id="2" name="Picture 1" descr="new-02.png"/>
           <p:cNvPicPr>
             <a:picLocks noChangeAspect="1"/>
           </p:cNvPicPr>
@@ -3410,13 +4429,47 @@
         <p:spPr>
           <a:xfrm>
             <a:off x="0" y="0"/>
-            <a:ext cx="12191695" cy="6858000"/>
+            <a:ext cx="12192000" cy="6858000"/>
           </a:xfrm>
           <a:prstGeom prst="rect">
             <a:avLst/>
           </a:prstGeom>
         </p:spPr>
       </p:pic>
+      <p:sp>
+        <p:nvSpPr>
+          <p:cNvPr id="3" name="TextBox 2"/>
+          <p:cNvSpPr txBox="1"/>
+          <p:nvPr/>
+        </p:nvSpPr>
+        <p:spPr>
+          <a:xfrm>
+            <a:off x="10731500" y="6464300"/>
+            <a:ext cx="1174750" cy="393700"/>
+          </a:xfrm>
+          <a:prstGeom prst="rect">
+            <a:avLst/>
+          </a:prstGeom>
+          <a:noFill/>
+        </p:spPr>
+        <p:txBody>
+          <a:bodyPr wrap="none" lIns="0" rIns="0" tIns="0" bIns="0" anchor="ctr">
+            <a:spAutoFit/>
+          </a:bodyPr>
+          <a:lstStyle/>
+          <a:p>
+            <a:pPr algn="r"/>
+            <a:r>
+              <a:rPr sz="1000">
+                <a:solidFill>
+                  <a:srgbClr val="5F6B84"/>
+                </a:solidFill>
+              </a:rPr>
+              <a:t>5 / 17</a:t>
+            </a:r>
+          </a:p>
+        </p:txBody>
+      </p:sp>
     </p:spTree>
   </p:cSld>
   <p:clrMapOvr>
@@ -3437,7 +4490,7 @@
       <p:grpSpPr/>
       <p:pic>
         <p:nvPicPr>
-          <p:cNvPr id="2" name="Picture 1" descr="slide-06.png"/>
+          <p:cNvPr id="2" name="Picture 1" descr="new-03.png"/>
           <p:cNvPicPr>
             <a:picLocks noChangeAspect="1"/>
           </p:cNvPicPr>
@@ -3452,13 +4505,47 @@
         <p:spPr>
           <a:xfrm>
             <a:off x="0" y="0"/>
-            <a:ext cx="12191695" cy="6858000"/>
+            <a:ext cx="12192000" cy="6858000"/>
           </a:xfrm>
           <a:prstGeom prst="rect">
             <a:avLst/>
           </a:prstGeom>
         </p:spPr>
       </p:pic>
+      <p:sp>
+        <p:nvSpPr>
+          <p:cNvPr id="3" name="TextBox 2"/>
+          <p:cNvSpPr txBox="1"/>
+          <p:nvPr/>
+        </p:nvSpPr>
+        <p:spPr>
+          <a:xfrm>
+            <a:off x="10731500" y="6464300"/>
+            <a:ext cx="1174750" cy="393700"/>
+          </a:xfrm>
+          <a:prstGeom prst="rect">
+            <a:avLst/>
+          </a:prstGeom>
+          <a:noFill/>
+        </p:spPr>
+        <p:txBody>
+          <a:bodyPr wrap="none" lIns="0" rIns="0" tIns="0" bIns="0" anchor="ctr">
+            <a:spAutoFit/>
+          </a:bodyPr>
+          <a:lstStyle/>
+          <a:p>
+            <a:pPr algn="r"/>
+            <a:r>
+              <a:rPr sz="1000">
+                <a:solidFill>
+                  <a:srgbClr val="5F6B84"/>
+                </a:solidFill>
+              </a:rPr>
+              <a:t>6 / 17</a:t>
+            </a:r>
+          </a:p>
+        </p:txBody>
+      </p:sp>
     </p:spTree>
   </p:cSld>
   <p:clrMapOvr>
@@ -3479,7 +4566,7 @@
       <p:grpSpPr/>
       <p:pic>
         <p:nvPicPr>
-          <p:cNvPr id="2" name="Picture 1" descr="slide-07.png"/>
+          <p:cNvPr id="2" name="Picture 1" descr="new-04.png"/>
           <p:cNvPicPr>
             <a:picLocks noChangeAspect="1"/>
           </p:cNvPicPr>
@@ -3494,13 +4581,47 @@
         <p:spPr>
           <a:xfrm>
             <a:off x="0" y="0"/>
-            <a:ext cx="12191695" cy="6858000"/>
+            <a:ext cx="12192000" cy="6858000"/>
           </a:xfrm>
           <a:prstGeom prst="rect">
             <a:avLst/>
           </a:prstGeom>
         </p:spPr>
       </p:pic>
+      <p:sp>
+        <p:nvSpPr>
+          <p:cNvPr id="3" name="TextBox 2"/>
+          <p:cNvSpPr txBox="1"/>
+          <p:nvPr/>
+        </p:nvSpPr>
+        <p:spPr>
+          <a:xfrm>
+            <a:off x="10731500" y="6464300"/>
+            <a:ext cx="1174750" cy="393700"/>
+          </a:xfrm>
+          <a:prstGeom prst="rect">
+            <a:avLst/>
+          </a:prstGeom>
+          <a:noFill/>
+        </p:spPr>
+        <p:txBody>
+          <a:bodyPr wrap="none" lIns="0" rIns="0" tIns="0" bIns="0" anchor="ctr">
+            <a:spAutoFit/>
+          </a:bodyPr>
+          <a:lstStyle/>
+          <a:p>
+            <a:pPr algn="r"/>
+            <a:r>
+              <a:rPr sz="1000">
+                <a:solidFill>
+                  <a:srgbClr val="5F6B84"/>
+                </a:solidFill>
+              </a:rPr>
+              <a:t>7 / 17</a:t>
+            </a:r>
+          </a:p>
+        </p:txBody>
+      </p:sp>
     </p:spTree>
   </p:cSld>
   <p:clrMapOvr>
@@ -3521,7 +4642,7 @@
       <p:grpSpPr/>
       <p:pic>
         <p:nvPicPr>
-          <p:cNvPr id="2" name="Picture 1" descr="slide-08.png"/>
+          <p:cNvPr id="2" name="Picture 1" descr="s04.png"/>
           <p:cNvPicPr>
             <a:picLocks noChangeAspect="1"/>
           </p:cNvPicPr>
@@ -3536,13 +4657,91 @@
         <p:spPr>
           <a:xfrm>
             <a:off x="0" y="0"/>
-            <a:ext cx="12191695" cy="6858000"/>
+            <a:ext cx="12192000" cy="6858000"/>
           </a:xfrm>
           <a:prstGeom prst="rect">
             <a:avLst/>
           </a:prstGeom>
         </p:spPr>
       </p:pic>
+      <p:sp>
+        <p:nvSpPr>
+          <p:cNvPr id="3" name="Rectangle 2"/>
+          <p:cNvSpPr/>
+          <p:nvPr/>
+        </p:nvSpPr>
+        <p:spPr>
+          <a:xfrm>
+            <a:off x="10731500" y="6464300"/>
+            <a:ext cx="1460500" cy="393700"/>
+          </a:xfrm>
+          <a:prstGeom prst="rect">
+            <a:avLst/>
+          </a:prstGeom>
+          <a:solidFill>
+            <a:srgbClr val="0A1018"/>
+          </a:solidFill>
+          <a:ln>
+            <a:noFill/>
+          </a:ln>
+          <a:effectLst/>
+        </p:spPr>
+        <p:style>
+          <a:lnRef idx="1">
+            <a:schemeClr val="accent1"/>
+          </a:lnRef>
+          <a:fillRef idx="3">
+            <a:schemeClr val="accent1"/>
+          </a:fillRef>
+          <a:effectRef idx="2">
+            <a:schemeClr val="accent1"/>
+          </a:effectRef>
+          <a:fontRef idx="minor">
+            <a:schemeClr val="lt1"/>
+          </a:fontRef>
+        </p:style>
+        <p:txBody>
+          <a:bodyPr rtlCol="0" anchor="ctr"/>
+          <a:lstStyle/>
+          <a:p>
+            <a:pPr algn="ctr"/>
+          </a:p>
+        </p:txBody>
+      </p:sp>
+      <p:sp>
+        <p:nvSpPr>
+          <p:cNvPr id="4" name="TextBox 3"/>
+          <p:cNvSpPr txBox="1"/>
+          <p:nvPr/>
+        </p:nvSpPr>
+        <p:spPr>
+          <a:xfrm>
+            <a:off x="10731500" y="6464300"/>
+            <a:ext cx="1174750" cy="393700"/>
+          </a:xfrm>
+          <a:prstGeom prst="rect">
+            <a:avLst/>
+          </a:prstGeom>
+          <a:noFill/>
+        </p:spPr>
+        <p:txBody>
+          <a:bodyPr wrap="none" lIns="0" rIns="0" tIns="0" bIns="0" anchor="ctr">
+            <a:spAutoFit/>
+          </a:bodyPr>
+          <a:lstStyle/>
+          <a:p>
+            <a:pPr algn="r"/>
+            <a:r>
+              <a:rPr sz="1000">
+                <a:solidFill>
+                  <a:srgbClr val="5F6B84"/>
+                </a:solidFill>
+              </a:rPr>
+              <a:t>8 / 17</a:t>
+            </a:r>
+          </a:p>
+        </p:txBody>
+      </p:sp>
     </p:spTree>
   </p:cSld>
   <p:clrMapOvr>
@@ -3563,7 +4762,7 @@
       <p:grpSpPr/>
       <p:pic>
         <p:nvPicPr>
-          <p:cNvPr id="2" name="Picture 1" descr="slide-09.png"/>
+          <p:cNvPr id="2" name="Picture 1" descr="s05.png"/>
           <p:cNvPicPr>
             <a:picLocks noChangeAspect="1"/>
           </p:cNvPicPr>
@@ -3578,13 +4777,91 @@
         <p:spPr>
           <a:xfrm>
             <a:off x="0" y="0"/>
-            <a:ext cx="12191695" cy="6858000"/>
+            <a:ext cx="12192000" cy="6858000"/>
           </a:xfrm>
           <a:prstGeom prst="rect">
             <a:avLst/>
           </a:prstGeom>
         </p:spPr>
       </p:pic>
+      <p:sp>
+        <p:nvSpPr>
+          <p:cNvPr id="3" name="Rectangle 2"/>
+          <p:cNvSpPr/>
+          <p:nvPr/>
+        </p:nvSpPr>
+        <p:spPr>
+          <a:xfrm>
+            <a:off x="10731500" y="6464300"/>
+            <a:ext cx="1460500" cy="393700"/>
+          </a:xfrm>
+          <a:prstGeom prst="rect">
+            <a:avLst/>
+          </a:prstGeom>
+          <a:solidFill>
+            <a:srgbClr val="0A1018"/>
+          </a:solidFill>
+          <a:ln>
+            <a:noFill/>
+          </a:ln>
+          <a:effectLst/>
+        </p:spPr>
+        <p:style>
+          <a:lnRef idx="1">
+            <a:schemeClr val="accent1"/>
+          </a:lnRef>
+          <a:fillRef idx="3">
+            <a:schemeClr val="accent1"/>
+          </a:fillRef>
+          <a:effectRef idx="2">
+            <a:schemeClr val="accent1"/>
+          </a:effectRef>
+          <a:fontRef idx="minor">
+            <a:schemeClr val="lt1"/>
+          </a:fontRef>
+        </p:style>
+        <p:txBody>
+          <a:bodyPr rtlCol="0" anchor="ctr"/>
+          <a:lstStyle/>
+          <a:p>
+            <a:pPr algn="ctr"/>
+          </a:p>
+        </p:txBody>
+      </p:sp>
+      <p:sp>
+        <p:nvSpPr>
+          <p:cNvPr id="4" name="TextBox 3"/>
+          <p:cNvSpPr txBox="1"/>
+          <p:nvPr/>
+        </p:nvSpPr>
+        <p:spPr>
+          <a:xfrm>
+            <a:off x="10731500" y="6464300"/>
+            <a:ext cx="1174750" cy="393700"/>
+          </a:xfrm>
+          <a:prstGeom prst="rect">
+            <a:avLst/>
+          </a:prstGeom>
+          <a:noFill/>
+        </p:spPr>
+        <p:txBody>
+          <a:bodyPr wrap="none" lIns="0" rIns="0" tIns="0" bIns="0" anchor="ctr">
+            <a:spAutoFit/>
+          </a:bodyPr>
+          <a:lstStyle/>
+          <a:p>
+            <a:pPr algn="r"/>
+            <a:r>
+              <a:rPr sz="1000">
+                <a:solidFill>
+                  <a:srgbClr val="5F6B84"/>
+                </a:solidFill>
+              </a:rPr>
+              <a:t>9 / 17</a:t>
+            </a:r>
+          </a:p>
+        </p:txBody>
+      </p:sp>
     </p:spTree>
   </p:cSld>
   <p:clrMapOvr>

--- a/competition/Aranea-Agents-初赛提交包-20260805/02-方案PPT.pptx
+++ b/competition/Aranea-Agents-初赛提交包-20260805/02-方案PPT.pptx
@@ -3593,7 +3593,7 @@
           <p:nvPr/>
         </p:nvPicPr>
         <p:blipFill>
-          <a:blip r:embed="rId2"/>
+          <a:blip r:embed="rId3"/>
           <a:stretch>
             <a:fillRect/>
           </a:stretch>
@@ -3789,7 +3789,7 @@
           <p:nvPr/>
         </p:nvPicPr>
         <p:blipFill>
-          <a:blip r:embed="rId2"/>
+          <a:blip r:embed="rId3"/>
           <a:stretch>
             <a:fillRect/>
           </a:stretch>
@@ -3985,7 +3985,7 @@
           <p:nvPr/>
         </p:nvPicPr>
         <p:blipFill>
-          <a:blip r:embed="rId2"/>
+          <a:blip r:embed="rId3"/>
           <a:stretch>
             <a:fillRect/>
           </a:stretch>
